--- a/Misc/Android_General.pptx
+++ b/Misc/Android_General.pptx
@@ -5,28 +5,33 @@
     <p:sldMasterId id="2147483648" r:id="rId1"/>
   </p:sldMasterIdLst>
   <p:notesMasterIdLst>
-    <p:notesMasterId r:id="rId14"/>
+    <p:notesMasterId r:id="rId19"/>
   </p:notesMasterIdLst>
   <p:handoutMasterIdLst>
-    <p:handoutMasterId r:id="rId15"/>
+    <p:handoutMasterId r:id="rId20"/>
   </p:handoutMasterIdLst>
   <p:sldIdLst>
     <p:sldId id="256" r:id="rId3"/>
     <p:sldId id="262" r:id="rId4"/>
-    <p:sldId id="257" r:id="rId5"/>
-    <p:sldId id="264" r:id="rId6"/>
-    <p:sldId id="265" r:id="rId7"/>
-    <p:sldId id="263" r:id="rId8"/>
-    <p:sldId id="261" r:id="rId9"/>
-    <p:sldId id="268" r:id="rId10"/>
-    <p:sldId id="270" r:id="rId11"/>
-    <p:sldId id="271" r:id="rId12"/>
-    <p:sldId id="269" r:id="rId13"/>
+    <p:sldId id="273" r:id="rId5"/>
+    <p:sldId id="284" r:id="rId6"/>
+    <p:sldId id="274" r:id="rId7"/>
+    <p:sldId id="257" r:id="rId8"/>
+    <p:sldId id="264" r:id="rId9"/>
+    <p:sldId id="265" r:id="rId10"/>
+    <p:sldId id="263" r:id="rId11"/>
+    <p:sldId id="261" r:id="rId12"/>
+    <p:sldId id="296" r:id="rId13"/>
+    <p:sldId id="268" r:id="rId14"/>
+    <p:sldId id="270" r:id="rId15"/>
+    <p:sldId id="271" r:id="rId16"/>
+    <p:sldId id="269" r:id="rId17"/>
+    <p:sldId id="285" r:id="rId18"/>
   </p:sldIdLst>
   <p:sldSz cx="12192000" cy="6858000"/>
   <p:notesSz cx="6858000" cy="9144000"/>
   <p:custDataLst>
-    <p:tags r:id="rId19"/>
+    <p:tags r:id="rId24"/>
   </p:custDataLst>
   <p:defaultTextStyle>
     <a:defPPr marL="0" marR="0" indent="0" algn="l" defTabSz="914400" rtl="0" fontAlgn="auto" latinLnBrk="1" hangingPunct="0">
@@ -4183,7 +4188,7 @@
       <p:grpSpPr/>
       <p:sp>
         <p:nvSpPr>
-          <p:cNvPr id="2" name="标题 1"/>
+          <p:cNvPr id="4" name="标题 3"/>
           <p:cNvSpPr>
             <a:spLocks noGrp="1"/>
           </p:cNvSpPr>
@@ -4197,7 +4202,7 @@
           <a:p>
             <a:r>
               <a:rPr lang="en-US" altLang="zh-CN"/>
-              <a:t>Python Support</a:t>
+              <a:t>SDK Build Tools</a:t>
             </a:r>
             <a:endParaRPr lang="en-US" altLang="zh-CN"/>
           </a:p>
@@ -4205,7 +4210,7 @@
       </p:sp>
       <p:sp>
         <p:nvSpPr>
-          <p:cNvPr id="3" name="内容占位符 2"/>
+          <p:cNvPr id="5" name="内容占位符 4"/>
           <p:cNvSpPr>
             <a:spLocks noGrp="1"/>
           </p:cNvSpPr>
@@ -4215,11 +4220,13 @@
         </p:nvSpPr>
         <p:spPr/>
         <p:txBody>
-          <a:bodyPr/>
+          <a:bodyPr>
+            <a:normAutofit lnSpcReduction="10000"/>
+          </a:bodyPr>
           <a:p>
             <a:r>
               <a:rPr lang="en-US" altLang="zh-CN"/>
-              <a:t>Steps</a:t>
+              <a:t>Check apk signature</a:t>
             </a:r>
             <a:endParaRPr lang="en-US" altLang="zh-CN"/>
           </a:p>
@@ -4227,31 +4234,23 @@
             <a:pPr lvl="1"/>
             <a:r>
               <a:rPr lang="en-US" altLang="zh-CN"/>
-              <a:t>install termux</a:t>
+              <a:t>keytool -printcert -jarfile {a.apk}</a:t>
             </a:r>
             <a:endParaRPr lang="en-US" altLang="zh-CN"/>
           </a:p>
           <a:p>
+            <a:pPr lvl="0"/>
+            <a:r>
+              <a:rPr lang="en-US" altLang="zh-CN"/>
+              <a:t>Check apk package name</a:t>
+            </a:r>
+            <a:endParaRPr lang="en-US" altLang="zh-CN"/>
+          </a:p>
+          <a:p>
             <a:pPr lvl="1"/>
             <a:r>
               <a:rPr lang="en-US" altLang="zh-CN"/>
-              <a:t>pkg install root-repo</a:t>
-            </a:r>
-            <a:endParaRPr lang="en-US" altLang="zh-CN"/>
-          </a:p>
-          <a:p>
-            <a:pPr lvl="1"/>
-            <a:r>
-              <a:rPr lang="en-US" altLang="zh-CN"/>
-              <a:t>pkg update</a:t>
-            </a:r>
-            <a:endParaRPr lang="en-US" altLang="zh-CN"/>
-          </a:p>
-          <a:p>
-            <a:pPr lvl="1"/>
-            <a:r>
-              <a:rPr lang="en-US" altLang="zh-CN"/>
-              <a:t>pkg install python</a:t>
+              <a:t>aapt dump badging {a.apk} | grep package:\ name</a:t>
             </a:r>
             <a:endParaRPr lang="en-US" altLang="zh-CN"/>
           </a:p>
@@ -4294,6 +4293,397 @@
           <a:p>
             <a:r>
               <a:rPr lang="en-US" altLang="zh-CN"/>
+              <a:t>Debug</a:t>
+            </a:r>
+            <a:endParaRPr lang="en-US" altLang="zh-CN"/>
+          </a:p>
+        </p:txBody>
+      </p:sp>
+      <p:sp>
+        <p:nvSpPr>
+          <p:cNvPr id="3" name="内容占位符 2"/>
+          <p:cNvSpPr>
+            <a:spLocks noGrp="1"/>
+          </p:cNvSpPr>
+          <p:nvPr>
+            <p:ph idx="1"/>
+          </p:nvPr>
+        </p:nvSpPr>
+        <p:spPr/>
+        <p:txBody>
+          <a:bodyPr/>
+          <a:p>
+            <a:r>
+              <a:rPr lang="en-US" altLang="zh-CN"/>
+              <a:t>UI methods</a:t>
+            </a:r>
+            <a:endParaRPr lang="en-US" altLang="zh-CN"/>
+          </a:p>
+          <a:p>
+            <a:pPr lvl="1"/>
+            <a:r>
+              <a:rPr lang="en-US" altLang="zh-CN"/>
+              <a:t>AlertDialog</a:t>
+            </a:r>
+            <a:endParaRPr lang="en-US" altLang="zh-CN"/>
+          </a:p>
+          <a:p>
+            <a:pPr lvl="1"/>
+            <a:r>
+              <a:rPr lang="en-US" altLang="zh-CN"/>
+              <a:t>Snackbar</a:t>
+            </a:r>
+            <a:endParaRPr lang="en-US" altLang="zh-CN"/>
+          </a:p>
+          <a:p>
+            <a:pPr lvl="1"/>
+            <a:r>
+              <a:rPr lang="en-US" altLang="zh-CN"/>
+              <a:t>Toast</a:t>
+            </a:r>
+            <a:endParaRPr lang="en-US" altLang="zh-CN"/>
+          </a:p>
+          <a:p>
+            <a:pPr lvl="2"/>
+            <a:r>
+              <a:rPr lang="en-US" altLang="zh-CN"/>
+              <a:t>short: about 2s, long: about 3.5s</a:t>
+            </a:r>
+            <a:endParaRPr lang="en-US" altLang="zh-CN"/>
+          </a:p>
+        </p:txBody>
+      </p:sp>
+    </p:spTree>
+    <p:custDataLst>
+      <p:tags r:id="rId1"/>
+    </p:custDataLst>
+  </p:cSld>
+  <p:clrMapOvr>
+    <a:masterClrMapping/>
+  </p:clrMapOvr>
+</p:sld>
+</file>
+
+<file path=ppt/slides/slide12.xml><?xml version="1.0" encoding="utf-8"?>
+<p:sld xmlns:a="http://schemas.openxmlformats.org/drawingml/2006/main" xmlns:r="http://schemas.openxmlformats.org/officeDocument/2006/relationships" xmlns:p="http://schemas.openxmlformats.org/presentationml/2006/main">
+  <p:cSld>
+    <p:spTree>
+      <p:nvGrpSpPr>
+        <p:cNvPr id="1" name=""/>
+        <p:cNvGrpSpPr/>
+        <p:nvPr/>
+      </p:nvGrpSpPr>
+      <p:grpSpPr/>
+      <p:sp>
+        <p:nvSpPr>
+          <p:cNvPr id="2" name="标题 1"/>
+          <p:cNvSpPr>
+            <a:spLocks noGrp="1"/>
+          </p:cNvSpPr>
+          <p:nvPr>
+            <p:ph type="title"/>
+          </p:nvPr>
+        </p:nvSpPr>
+        <p:spPr/>
+        <p:txBody>
+          <a:bodyPr/>
+          <a:p>
+            <a:r>
+              <a:rPr lang="en-US" altLang="zh-CN"/>
+              <a:t>Keystore</a:t>
+            </a:r>
+            <a:endParaRPr lang="en-US" altLang="zh-CN"/>
+          </a:p>
+        </p:txBody>
+      </p:sp>
+      <p:sp>
+        <p:nvSpPr>
+          <p:cNvPr id="3" name="内容占位符 2"/>
+          <p:cNvSpPr>
+            <a:spLocks noGrp="1"/>
+          </p:cNvSpPr>
+          <p:nvPr>
+            <p:ph idx="1"/>
+          </p:nvPr>
+        </p:nvSpPr>
+        <p:spPr/>
+        <p:txBody>
+          <a:bodyPr/>
+          <a:p>
+            <a:r>
+              <a:rPr lang="en-US" altLang="zh-CN"/>
+              <a:t>Generate</a:t>
+            </a:r>
+            <a:endParaRPr lang="en-US" altLang="zh-CN"/>
+          </a:p>
+          <a:p>
+            <a:pPr lvl="1"/>
+            <a:r>
+              <a:rPr lang="en-US" altLang="zh-CN"/>
+              <a:t>keytool -genkey -alias mydomain -keyalg RSA -keystore keystore.jks  -keysize 2048</a:t>
+            </a:r>
+            <a:endParaRPr lang="en-US" altLang="zh-CN"/>
+          </a:p>
+          <a:p>
+            <a:r>
+              <a:rPr lang="en-US" altLang="zh-CN"/>
+              <a:t>Verify</a:t>
+            </a:r>
+            <a:endParaRPr lang="en-US" altLang="zh-CN"/>
+          </a:p>
+          <a:p>
+            <a:pPr lvl="1"/>
+            <a:r>
+              <a:rPr lang="en-US" altLang="zh-CN"/>
+              <a:t>onkstore -file my_keystore -verify</a:t>
+            </a:r>
+            <a:endParaRPr lang="en-US" altLang="zh-CN"/>
+          </a:p>
+          <a:p>
+            <a:pPr lvl="1"/>
+            <a:r>
+              <a:rPr lang="en-US" altLang="zh-CN"/>
+              <a:t>keytool -list -v -keystore keystore.jks</a:t>
+            </a:r>
+            <a:endParaRPr lang="en-US" altLang="zh-CN"/>
+          </a:p>
+          <a:p>
+            <a:pPr lvl="1"/>
+            <a:endParaRPr lang="en-US" altLang="zh-CN"/>
+          </a:p>
+        </p:txBody>
+      </p:sp>
+    </p:spTree>
+    <p:custDataLst>
+      <p:tags r:id="rId1"/>
+    </p:custDataLst>
+  </p:cSld>
+  <p:clrMapOvr>
+    <a:masterClrMapping/>
+  </p:clrMapOvr>
+</p:sld>
+</file>
+
+<file path=ppt/slides/slide13.xml><?xml version="1.0" encoding="utf-8"?>
+<p:sld xmlns:a="http://schemas.openxmlformats.org/drawingml/2006/main" xmlns:r="http://schemas.openxmlformats.org/officeDocument/2006/relationships" xmlns:p="http://schemas.openxmlformats.org/presentationml/2006/main">
+  <p:cSld>
+    <p:spTree>
+      <p:nvGrpSpPr>
+        <p:cNvPr id="1" name=""/>
+        <p:cNvGrpSpPr/>
+        <p:nvPr/>
+      </p:nvGrpSpPr>
+      <p:grpSpPr/>
+      <p:sp>
+        <p:nvSpPr>
+          <p:cNvPr id="2" name="标题 1"/>
+          <p:cNvSpPr>
+            <a:spLocks noGrp="1"/>
+          </p:cNvSpPr>
+          <p:nvPr>
+            <p:ph type="title"/>
+          </p:nvPr>
+        </p:nvSpPr>
+        <p:spPr/>
+        <p:txBody>
+          <a:bodyPr/>
+          <a:p>
+            <a:r>
+              <a:rPr lang="en-US" altLang="zh-CN"/>
+              <a:t>Apps</a:t>
+            </a:r>
+            <a:endParaRPr lang="en-US" altLang="zh-CN"/>
+          </a:p>
+        </p:txBody>
+      </p:sp>
+      <p:sp>
+        <p:nvSpPr>
+          <p:cNvPr id="3" name="内容占位符 2"/>
+          <p:cNvSpPr>
+            <a:spLocks noGrp="1"/>
+          </p:cNvSpPr>
+          <p:nvPr>
+            <p:ph idx="1"/>
+          </p:nvPr>
+        </p:nvSpPr>
+        <p:spPr/>
+        <p:txBody>
+          <a:bodyPr/>
+          <a:p>
+            <a:r>
+              <a:rPr lang="en-US" altLang="zh-CN"/>
+              <a:t>Termux</a:t>
+            </a:r>
+            <a:endParaRPr lang="en-US" altLang="zh-CN"/>
+          </a:p>
+          <a:p>
+            <a:pPr lvl="1"/>
+            <a:r>
+              <a:rPr lang="en-US" altLang="zh-CN"/>
+              <a:t>terminal app</a:t>
+            </a:r>
+            <a:endParaRPr lang="en-US" altLang="zh-CN"/>
+          </a:p>
+          <a:p>
+            <a:pPr lvl="1"/>
+            <a:r>
+              <a:rPr lang="en-US" altLang="zh-CN"/>
+              <a:t>https://github.com/termux</a:t>
+            </a:r>
+            <a:endParaRPr lang="en-US" altLang="zh-CN"/>
+          </a:p>
+          <a:p>
+            <a:pPr lvl="0"/>
+            <a:r>
+              <a:rPr lang="en-US" altLang="zh-CN"/>
+              <a:t>JuiceSSH</a:t>
+            </a:r>
+            <a:endParaRPr lang="en-US" altLang="zh-CN"/>
+          </a:p>
+          <a:p>
+            <a:pPr lvl="1"/>
+            <a:r>
+              <a:rPr lang="en-US" altLang="zh-CN"/>
+              <a:t>https://juicessh.com/</a:t>
+            </a:r>
+            <a:endParaRPr lang="en-US" altLang="zh-CN"/>
+          </a:p>
+        </p:txBody>
+      </p:sp>
+    </p:spTree>
+    <p:custDataLst>
+      <p:tags r:id="rId1"/>
+    </p:custDataLst>
+  </p:cSld>
+  <p:clrMapOvr>
+    <a:masterClrMapping/>
+  </p:clrMapOvr>
+</p:sld>
+</file>
+
+<file path=ppt/slides/slide14.xml><?xml version="1.0" encoding="utf-8"?>
+<p:sld xmlns:a="http://schemas.openxmlformats.org/drawingml/2006/main" xmlns:r="http://schemas.openxmlformats.org/officeDocument/2006/relationships" xmlns:p="http://schemas.openxmlformats.org/presentationml/2006/main">
+  <p:cSld>
+    <p:spTree>
+      <p:nvGrpSpPr>
+        <p:cNvPr id="1" name=""/>
+        <p:cNvGrpSpPr/>
+        <p:nvPr/>
+      </p:nvGrpSpPr>
+      <p:grpSpPr/>
+      <p:sp>
+        <p:nvSpPr>
+          <p:cNvPr id="2" name="标题 1"/>
+          <p:cNvSpPr>
+            <a:spLocks noGrp="1"/>
+          </p:cNvSpPr>
+          <p:nvPr>
+            <p:ph type="title"/>
+          </p:nvPr>
+        </p:nvSpPr>
+        <p:spPr/>
+        <p:txBody>
+          <a:bodyPr/>
+          <a:p>
+            <a:r>
+              <a:rPr lang="en-US" altLang="zh-CN"/>
+              <a:t>Python Support</a:t>
+            </a:r>
+            <a:endParaRPr lang="en-US" altLang="zh-CN"/>
+          </a:p>
+        </p:txBody>
+      </p:sp>
+      <p:sp>
+        <p:nvSpPr>
+          <p:cNvPr id="3" name="内容占位符 2"/>
+          <p:cNvSpPr>
+            <a:spLocks noGrp="1"/>
+          </p:cNvSpPr>
+          <p:nvPr>
+            <p:ph idx="1"/>
+          </p:nvPr>
+        </p:nvSpPr>
+        <p:spPr/>
+        <p:txBody>
+          <a:bodyPr/>
+          <a:p>
+            <a:r>
+              <a:rPr lang="en-US" altLang="zh-CN"/>
+              <a:t>Steps</a:t>
+            </a:r>
+            <a:endParaRPr lang="en-US" altLang="zh-CN"/>
+          </a:p>
+          <a:p>
+            <a:pPr lvl="1"/>
+            <a:r>
+              <a:rPr lang="en-US" altLang="zh-CN"/>
+              <a:t>install termux</a:t>
+            </a:r>
+            <a:endParaRPr lang="en-US" altLang="zh-CN"/>
+          </a:p>
+          <a:p>
+            <a:pPr lvl="1"/>
+            <a:r>
+              <a:rPr lang="en-US" altLang="zh-CN"/>
+              <a:t>pkg install root-repo</a:t>
+            </a:r>
+            <a:endParaRPr lang="en-US" altLang="zh-CN"/>
+          </a:p>
+          <a:p>
+            <a:pPr lvl="1"/>
+            <a:r>
+              <a:rPr lang="en-US" altLang="zh-CN"/>
+              <a:t>pkg update</a:t>
+            </a:r>
+            <a:endParaRPr lang="en-US" altLang="zh-CN"/>
+          </a:p>
+          <a:p>
+            <a:pPr lvl="1"/>
+            <a:r>
+              <a:rPr lang="en-US" altLang="zh-CN"/>
+              <a:t>pkg install python</a:t>
+            </a:r>
+            <a:endParaRPr lang="en-US" altLang="zh-CN"/>
+          </a:p>
+        </p:txBody>
+      </p:sp>
+    </p:spTree>
+    <p:custDataLst>
+      <p:tags r:id="rId1"/>
+    </p:custDataLst>
+  </p:cSld>
+  <p:clrMapOvr>
+    <a:masterClrMapping/>
+  </p:clrMapOvr>
+</p:sld>
+</file>
+
+<file path=ppt/slides/slide15.xml><?xml version="1.0" encoding="utf-8"?>
+<p:sld xmlns:a="http://schemas.openxmlformats.org/drawingml/2006/main" xmlns:r="http://schemas.openxmlformats.org/officeDocument/2006/relationships" xmlns:p="http://schemas.openxmlformats.org/presentationml/2006/main">
+  <p:cSld>
+    <p:spTree>
+      <p:nvGrpSpPr>
+        <p:cNvPr id="1" name=""/>
+        <p:cNvGrpSpPr/>
+        <p:nvPr/>
+      </p:nvGrpSpPr>
+      <p:grpSpPr/>
+      <p:sp>
+        <p:nvSpPr>
+          <p:cNvPr id="2" name="标题 1"/>
+          <p:cNvSpPr>
+            <a:spLocks noGrp="1"/>
+          </p:cNvSpPr>
+          <p:nvPr>
+            <p:ph type="title"/>
+          </p:nvPr>
+        </p:nvSpPr>
+        <p:spPr/>
+        <p:txBody>
+          <a:bodyPr/>
+          <a:p>
+            <a:r>
+              <a:rPr lang="en-US" altLang="zh-CN"/>
               <a:t>Printing</a:t>
             </a:r>
             <a:endParaRPr lang="en-US" altLang="zh-CN"/>
@@ -4336,6 +4726,111 @@
             <a:endParaRPr lang="en-US" altLang="zh-CN"/>
           </a:p>
           <a:p>
+            <a:endParaRPr lang="en-US" altLang="zh-CN"/>
+          </a:p>
+        </p:txBody>
+      </p:sp>
+    </p:spTree>
+    <p:custDataLst>
+      <p:tags r:id="rId1"/>
+    </p:custDataLst>
+  </p:cSld>
+  <p:clrMapOvr>
+    <a:masterClrMapping/>
+  </p:clrMapOvr>
+</p:sld>
+</file>
+
+<file path=ppt/slides/slide16.xml><?xml version="1.0" encoding="utf-8"?>
+<p:sld xmlns:a="http://schemas.openxmlformats.org/drawingml/2006/main" xmlns:r="http://schemas.openxmlformats.org/officeDocument/2006/relationships" xmlns:p="http://schemas.openxmlformats.org/presentationml/2006/main">
+  <p:cSld>
+    <p:spTree>
+      <p:nvGrpSpPr>
+        <p:cNvPr id="1" name=""/>
+        <p:cNvGrpSpPr/>
+        <p:nvPr/>
+      </p:nvGrpSpPr>
+      <p:grpSpPr/>
+      <p:sp>
+        <p:nvSpPr>
+          <p:cNvPr id="2" name="标题 1"/>
+          <p:cNvSpPr>
+            <a:spLocks noGrp="1"/>
+          </p:cNvSpPr>
+          <p:nvPr>
+            <p:ph type="title"/>
+          </p:nvPr>
+        </p:nvSpPr>
+        <p:spPr/>
+        <p:txBody>
+          <a:bodyPr/>
+          <a:p>
+            <a:r>
+              <a:rPr lang="en-US" altLang="zh-CN"/>
+              <a:t>FAQ</a:t>
+            </a:r>
+            <a:endParaRPr lang="en-US" altLang="zh-CN"/>
+          </a:p>
+        </p:txBody>
+      </p:sp>
+      <p:sp>
+        <p:nvSpPr>
+          <p:cNvPr id="3" name="内容占位符 2"/>
+          <p:cNvSpPr>
+            <a:spLocks noGrp="1"/>
+          </p:cNvSpPr>
+          <p:nvPr>
+            <p:ph idx="1"/>
+          </p:nvPr>
+        </p:nvSpPr>
+        <p:spPr/>
+        <p:txBody>
+          <a:bodyPr/>
+          <a:p>
+            <a:r>
+              <a:rPr lang="zh-CN" altLang="en-US"/>
+              <a:t>cvc-complex-type.2.4.a: 发现了以元素 ‘base-extension’ 开头的无效内容。应以 ‘{layoutlib}’ 之一开头。</a:t>
+            </a:r>
+            <a:endParaRPr lang="zh-CN" altLang="en-US"/>
+          </a:p>
+          <a:p>
+            <a:pPr lvl="1"/>
+            <a:r>
+              <a:rPr lang="zh-CN" altLang="en-US"/>
+              <a:t>升级</a:t>
+            </a:r>
+            <a:r>
+              <a:rPr lang="en-US" altLang="zh-CN"/>
+              <a:t>gradle</a:t>
+            </a:r>
+            <a:endParaRPr lang="en-US" altLang="zh-CN"/>
+          </a:p>
+          <a:p>
+            <a:pPr lvl="2"/>
+            <a:r>
+              <a:rPr lang="zh-CN" altLang="en-US"/>
+              <a:t>修改</a:t>
+            </a:r>
+            <a:r>
+              <a:rPr lang="en-US" altLang="zh-CN"/>
+              <a:t>graddle-wrapper.properties</a:t>
+            </a:r>
+            <a:r>
+              <a:rPr lang="zh-CN" altLang="en-US"/>
+              <a:t>中distributionUrl项</a:t>
+            </a:r>
+            <a:endParaRPr lang="zh-CN" altLang="en-US"/>
+          </a:p>
+          <a:p>
+            <a:pPr lvl="2"/>
+            <a:r>
+              <a:rPr lang="zh-CN" altLang="en-US"/>
+              <a:t>修改</a:t>
+            </a:r>
+            <a:r>
+              <a:rPr lang="en-US" altLang="zh-CN"/>
+              <a:t>$root/build.gradle</a:t>
+            </a:r>
             <a:endParaRPr lang="en-US" altLang="zh-CN"/>
           </a:p>
         </p:txBody>
@@ -4419,6 +4914,1366 @@
 </file>
 
 <file path=ppt/slides/slide3.xml><?xml version="1.0" encoding="utf-8"?>
+<p:sld xmlns:a="http://schemas.openxmlformats.org/drawingml/2006/main" xmlns:r="http://schemas.openxmlformats.org/officeDocument/2006/relationships" xmlns:p="http://schemas.openxmlformats.org/presentationml/2006/main">
+  <p:cSld>
+    <p:spTree>
+      <p:nvGrpSpPr>
+        <p:cNvPr id="1" name=""/>
+        <p:cNvGrpSpPr/>
+        <p:nvPr/>
+      </p:nvGrpSpPr>
+      <p:grpSpPr/>
+      <p:sp>
+        <p:nvSpPr>
+          <p:cNvPr id="2" name="标题 1"/>
+          <p:cNvSpPr>
+            <a:spLocks noGrp="1"/>
+          </p:cNvSpPr>
+          <p:nvPr>
+            <p:ph type="title"/>
+          </p:nvPr>
+        </p:nvSpPr>
+        <p:spPr/>
+        <p:txBody>
+          <a:bodyPr/>
+          <a:p>
+            <a:r>
+              <a:rPr lang="en-US" altLang="zh-CN"/>
+              <a:t>Set Up Dev Env on Windows</a:t>
+            </a:r>
+            <a:endParaRPr lang="en-US" altLang="zh-CN"/>
+          </a:p>
+        </p:txBody>
+      </p:sp>
+      <p:sp>
+        <p:nvSpPr>
+          <p:cNvPr id="3" name="内容占位符 2"/>
+          <p:cNvSpPr>
+            <a:spLocks noGrp="1"/>
+          </p:cNvSpPr>
+          <p:nvPr>
+            <p:ph idx="1"/>
+          </p:nvPr>
+        </p:nvSpPr>
+        <p:spPr>
+          <a:xfrm>
+            <a:off x="838200" y="1211580"/>
+            <a:ext cx="6214745" cy="4549140"/>
+          </a:xfrm>
+        </p:spPr>
+        <p:txBody>
+          <a:bodyPr/>
+          <a:p>
+            <a:r>
+              <a:rPr lang="en-US" altLang="zh-CN"/>
+              <a:t>Steps</a:t>
+            </a:r>
+            <a:endParaRPr lang="en-US" altLang="zh-CN"/>
+          </a:p>
+          <a:p>
+            <a:pPr lvl="1"/>
+            <a:r>
+              <a:rPr lang="en-US" altLang="zh-CN"/>
+              <a:t>Download and install JDK</a:t>
+            </a:r>
+            <a:endParaRPr lang="en-US" altLang="zh-CN"/>
+          </a:p>
+          <a:p>
+            <a:pPr lvl="1"/>
+            <a:r>
+              <a:rPr lang="en-US" altLang="zh-CN"/>
+              <a:t>Download and install Android Studio from https://developer.android.google.cn/</a:t>
+            </a:r>
+            <a:endParaRPr lang="en-US" altLang="zh-CN"/>
+          </a:p>
+          <a:p>
+            <a:pPr lvl="1"/>
+            <a:r>
+              <a:rPr lang="en-US" altLang="zh-CN"/>
+              <a:t>Download and install </a:t>
+            </a:r>
+            <a:r>
+              <a:rPr lang="en-US" altLang="zh-CN" b="1"/>
+              <a:t>gradio</a:t>
+            </a:r>
+            <a:endParaRPr lang="en-US" altLang="zh-CN"/>
+          </a:p>
+          <a:p>
+            <a:pPr lvl="2"/>
+            <a:r>
+              <a:rPr lang="en-US" altLang="zh-CN"/>
+              <a:t>download from https://gradle.org/releases/</a:t>
+            </a:r>
+            <a:endParaRPr lang="en-US" altLang="zh-CN"/>
+          </a:p>
+          <a:p>
+            <a:pPr lvl="2"/>
+            <a:r>
+              <a:rPr lang="en-US" altLang="zh-CN"/>
+              <a:t>unzip</a:t>
+            </a:r>
+            <a:endParaRPr lang="en-US" altLang="zh-CN"/>
+          </a:p>
+          <a:p>
+            <a:pPr lvl="2"/>
+            <a:r>
+              <a:rPr lang="en-US" altLang="zh-CN"/>
+              <a:t>add bin subfolder in unzipped folder to system path, e.g. D:\Programs\gradle-8.10\bin</a:t>
+            </a:r>
+            <a:endParaRPr lang="en-US" altLang="zh-CN"/>
+          </a:p>
+          <a:p>
+            <a:pPr lvl="2"/>
+            <a:r>
+              <a:rPr lang="en-US" altLang="zh-CN"/>
+              <a:t>run “gradle -v” to verify installation</a:t>
+            </a:r>
+            <a:endParaRPr lang="en-US" altLang="zh-CN"/>
+          </a:p>
+          <a:p>
+            <a:pPr lvl="1"/>
+            <a:r>
+              <a:rPr lang="en-US" altLang="zh-CN"/>
+              <a:t>Configure mirror</a:t>
+            </a:r>
+            <a:endParaRPr lang="en-US" altLang="zh-CN"/>
+          </a:p>
+          <a:p>
+            <a:pPr lvl="2"/>
+            <a:r>
+              <a:rPr lang="en-US" altLang="zh-CN"/>
+              <a:t>在$GRADLE_HOME/init.d/目录下新建文件：init.gradle</a:t>
+            </a:r>
+            <a:endParaRPr lang="en-US" altLang="zh-CN"/>
+          </a:p>
+        </p:txBody>
+      </p:sp>
+      <p:sp>
+        <p:nvSpPr>
+          <p:cNvPr id="4" name="文本框 3"/>
+          <p:cNvSpPr txBox="1"/>
+          <p:nvPr/>
+        </p:nvSpPr>
+        <p:spPr>
+          <a:xfrm>
+            <a:off x="7252970" y="1339850"/>
+            <a:ext cx="4387850" cy="1198880"/>
+          </a:xfrm>
+          <a:prstGeom prst="rect">
+            <a:avLst/>
+          </a:prstGeom>
+          <a:noFill/>
+          <a:ln>
+            <a:solidFill>
+              <a:srgbClr val="C00000"/>
+            </a:solidFill>
+          </a:ln>
+        </p:spPr>
+        <p:txBody>
+          <a:bodyPr wrap="square" rtlCol="0">
+            <a:spAutoFit/>
+          </a:bodyPr>
+          <a:p>
+            <a:pPr algn="l"/>
+            <a:r>
+              <a:rPr lang="en-US" altLang="zh-CN" sz="1200">
+                <a:solidFill>
+                  <a:schemeClr val="tx1"/>
+                </a:solidFill>
+                <a:effectLst/>
+                <a:latin typeface="+mj-lt"/>
+                <a:ea typeface="宋体" panose="02010600030101010101" pitchFamily="2" charset="-122"/>
+                <a:cs typeface="+mj-lt"/>
+              </a:rPr>
+              <a:t># ~/.gradle/init.gradle</a:t>
+            </a:r>
+            <a:endParaRPr lang="en-US" altLang="zh-CN" sz="1200">
+              <a:solidFill>
+                <a:schemeClr val="tx1"/>
+              </a:solidFill>
+              <a:effectLst/>
+              <a:latin typeface="+mj-lt"/>
+              <a:ea typeface="宋体" panose="02010600030101010101" pitchFamily="2" charset="-122"/>
+              <a:cs typeface="+mj-lt"/>
+            </a:endParaRPr>
+          </a:p>
+          <a:p>
+            <a:pPr algn="l"/>
+            <a:r>
+              <a:rPr lang="en-US" altLang="zh-CN" sz="1200">
+                <a:solidFill>
+                  <a:schemeClr val="tx1"/>
+                </a:solidFill>
+                <a:effectLst/>
+                <a:latin typeface="+mj-lt"/>
+                <a:ea typeface="宋体" panose="02010600030101010101" pitchFamily="2" charset="-122"/>
+                <a:cs typeface="+mj-lt"/>
+              </a:rPr>
+              <a:t>allprojects {</a:t>
+            </a:r>
+            <a:endParaRPr lang="en-US" altLang="zh-CN" sz="1200">
+              <a:solidFill>
+                <a:schemeClr val="tx1"/>
+              </a:solidFill>
+              <a:effectLst/>
+              <a:latin typeface="+mj-lt"/>
+              <a:ea typeface="宋体" panose="02010600030101010101" pitchFamily="2" charset="-122"/>
+              <a:cs typeface="+mj-lt"/>
+            </a:endParaRPr>
+          </a:p>
+          <a:p>
+            <a:pPr algn="l"/>
+            <a:r>
+              <a:rPr lang="en-US" altLang="zh-CN" sz="1200">
+                <a:solidFill>
+                  <a:schemeClr val="tx1"/>
+                </a:solidFill>
+                <a:effectLst/>
+                <a:latin typeface="+mj-lt"/>
+                <a:ea typeface="宋体" panose="02010600030101010101" pitchFamily="2" charset="-122"/>
+                <a:cs typeface="+mj-lt"/>
+              </a:rPr>
+              <a:t>    repositories {</a:t>
+            </a:r>
+            <a:endParaRPr lang="en-US" altLang="zh-CN" sz="1200">
+              <a:solidFill>
+                <a:schemeClr val="tx1"/>
+              </a:solidFill>
+              <a:effectLst/>
+              <a:latin typeface="+mj-lt"/>
+              <a:ea typeface="宋体" panose="02010600030101010101" pitchFamily="2" charset="-122"/>
+              <a:cs typeface="+mj-lt"/>
+            </a:endParaRPr>
+          </a:p>
+          <a:p>
+            <a:pPr algn="l"/>
+            <a:r>
+              <a:rPr lang="en-US" altLang="zh-CN" sz="1200">
+                <a:solidFill>
+                  <a:schemeClr val="tx1"/>
+                </a:solidFill>
+                <a:effectLst/>
+                <a:latin typeface="+mj-lt"/>
+                <a:ea typeface="宋体" panose="02010600030101010101" pitchFamily="2" charset="-122"/>
+                <a:cs typeface="+mj-lt"/>
+              </a:rPr>
+              <a:t>        maven { url 'https://maven.aliyun.com/repository/public' }</a:t>
+            </a:r>
+            <a:endParaRPr lang="en-US" altLang="zh-CN" sz="1200">
+              <a:solidFill>
+                <a:schemeClr val="tx1"/>
+              </a:solidFill>
+              <a:effectLst/>
+              <a:latin typeface="+mj-lt"/>
+              <a:ea typeface="宋体" panose="02010600030101010101" pitchFamily="2" charset="-122"/>
+              <a:cs typeface="+mj-lt"/>
+            </a:endParaRPr>
+          </a:p>
+          <a:p>
+            <a:pPr algn="l"/>
+            <a:r>
+              <a:rPr lang="en-US" altLang="zh-CN" sz="1200">
+                <a:solidFill>
+                  <a:schemeClr val="tx1"/>
+                </a:solidFill>
+                <a:effectLst/>
+                <a:latin typeface="+mj-lt"/>
+                <a:ea typeface="宋体" panose="02010600030101010101" pitchFamily="2" charset="-122"/>
+                <a:cs typeface="+mj-lt"/>
+              </a:rPr>
+              <a:t>    }</a:t>
+            </a:r>
+            <a:endParaRPr lang="en-US" altLang="zh-CN" sz="1200">
+              <a:solidFill>
+                <a:schemeClr val="tx1"/>
+              </a:solidFill>
+              <a:effectLst/>
+              <a:latin typeface="+mj-lt"/>
+              <a:ea typeface="宋体" panose="02010600030101010101" pitchFamily="2" charset="-122"/>
+              <a:cs typeface="+mj-lt"/>
+            </a:endParaRPr>
+          </a:p>
+          <a:p>
+            <a:pPr algn="l"/>
+            <a:r>
+              <a:rPr lang="en-US" altLang="zh-CN" sz="1200">
+                <a:solidFill>
+                  <a:schemeClr val="tx1"/>
+                </a:solidFill>
+                <a:effectLst/>
+                <a:latin typeface="+mj-lt"/>
+                <a:ea typeface="宋体" panose="02010600030101010101" pitchFamily="2" charset="-122"/>
+                <a:cs typeface="+mj-lt"/>
+              </a:rPr>
+              <a:t>}</a:t>
+            </a:r>
+            <a:endParaRPr lang="en-US" altLang="zh-CN" sz="1200">
+              <a:solidFill>
+                <a:schemeClr val="tx1"/>
+              </a:solidFill>
+              <a:effectLst/>
+              <a:latin typeface="+mj-lt"/>
+              <a:ea typeface="宋体" panose="02010600030101010101" pitchFamily="2" charset="-122"/>
+              <a:cs typeface="+mj-lt"/>
+            </a:endParaRPr>
+          </a:p>
+        </p:txBody>
+      </p:sp>
+    </p:spTree>
+    <p:custDataLst>
+      <p:tags r:id="rId1"/>
+    </p:custDataLst>
+  </p:cSld>
+  <p:clrMapOvr>
+    <a:masterClrMapping/>
+  </p:clrMapOvr>
+</p:sld>
+</file>
+
+<file path=ppt/slides/slide4.xml><?xml version="1.0" encoding="utf-8"?>
+<p:sld xmlns:a="http://schemas.openxmlformats.org/drawingml/2006/main" xmlns:r="http://schemas.openxmlformats.org/officeDocument/2006/relationships" xmlns:p="http://schemas.openxmlformats.org/presentationml/2006/main">
+  <p:cSld>
+    <p:spTree>
+      <p:nvGrpSpPr>
+        <p:cNvPr id="1" name=""/>
+        <p:cNvGrpSpPr/>
+        <p:nvPr/>
+      </p:nvGrpSpPr>
+      <p:grpSpPr/>
+      <p:sp>
+        <p:nvSpPr>
+          <p:cNvPr id="2" name="标题 1"/>
+          <p:cNvSpPr>
+            <a:spLocks noGrp="1"/>
+          </p:cNvSpPr>
+          <p:nvPr>
+            <p:ph type="title"/>
+          </p:nvPr>
+        </p:nvSpPr>
+        <p:spPr/>
+        <p:txBody>
+          <a:bodyPr/>
+          <a:p>
+            <a:r>
+              <a:rPr lang="en-US" altLang="zh-CN"/>
+              <a:t>Gradle</a:t>
+            </a:r>
+            <a:endParaRPr lang="en-US" altLang="zh-CN"/>
+          </a:p>
+        </p:txBody>
+      </p:sp>
+      <p:sp>
+        <p:nvSpPr>
+          <p:cNvPr id="3" name="内容占位符 2"/>
+          <p:cNvSpPr>
+            <a:spLocks noGrp="1"/>
+          </p:cNvSpPr>
+          <p:nvPr>
+            <p:ph idx="1"/>
+          </p:nvPr>
+        </p:nvSpPr>
+        <p:spPr>
+          <a:xfrm>
+            <a:off x="838200" y="1211580"/>
+            <a:ext cx="4950460" cy="4549140"/>
+          </a:xfrm>
+        </p:spPr>
+        <p:txBody>
+          <a:bodyPr>
+            <a:normAutofit fontScale="80000"/>
+          </a:bodyPr>
+          <a:p>
+            <a:r>
+              <a:rPr lang="zh-CN" altLang="en-US"/>
+              <a:t>国内镜像</a:t>
+            </a:r>
+            <a:endParaRPr lang="zh-CN" altLang="en-US"/>
+          </a:p>
+          <a:p>
+            <a:pPr lvl="1"/>
+            <a:r>
+              <a:rPr lang="zh-CN" altLang="en-US"/>
+              <a:t>https://www.jianshu.com/p/8a1148d1162d</a:t>
+            </a:r>
+            <a:endParaRPr lang="zh-CN" altLang="en-US"/>
+          </a:p>
+          <a:p>
+            <a:pPr lvl="0"/>
+            <a:r>
+              <a:rPr lang="en-US" altLang="zh-CN"/>
+              <a:t>gradle wrapper</a:t>
+            </a:r>
+            <a:endParaRPr lang="en-US" altLang="zh-CN"/>
+          </a:p>
+          <a:p>
+            <a:pPr lvl="1"/>
+            <a:r>
+              <a:rPr lang="en-US" altLang="zh-CN">
+                <a:sym typeface="+mn-ea"/>
+              </a:rPr>
+              <a:t>$HOME/.gradle/wrapper/dists/</a:t>
+            </a:r>
+            <a:endParaRPr lang="en-US" altLang="zh-CN"/>
+          </a:p>
+          <a:p>
+            <a:pPr lvl="1"/>
+            <a:r>
+              <a:rPr lang="en-US" altLang="zh-CN"/>
+              <a:t>gradle/wrapper/gradle-wrapper.properties</a:t>
+            </a:r>
+            <a:endParaRPr lang="en-US" altLang="zh-CN"/>
+          </a:p>
+          <a:p>
+            <a:pPr lvl="0"/>
+            <a:r>
+              <a:rPr lang="en-US" altLang="zh-CN"/>
+              <a:t>gradle config</a:t>
+            </a:r>
+            <a:endParaRPr lang="en-US" altLang="zh-CN"/>
+          </a:p>
+          <a:p>
+            <a:pPr lvl="1"/>
+            <a:r>
+              <a:rPr lang="en-US" altLang="zh-CN"/>
+              <a:t>$root/build.gradle</a:t>
+            </a:r>
+            <a:endParaRPr lang="en-US" altLang="zh-CN"/>
+          </a:p>
+          <a:p>
+            <a:pPr lvl="1"/>
+            <a:r>
+              <a:rPr lang="en-US" altLang="zh-CN"/>
+              <a:t>$root/app/build.gradle</a:t>
+            </a:r>
+            <a:endParaRPr lang="en-US" altLang="zh-CN"/>
+          </a:p>
+          <a:p>
+            <a:pPr lvl="0"/>
+            <a:r>
+              <a:rPr lang="en-US" altLang="zh-CN">
+                <a:sym typeface="+mn-ea"/>
+              </a:rPr>
+              <a:t>AGP (Android Gradle Plugin)</a:t>
+            </a:r>
+            <a:endParaRPr lang="en-US" altLang="zh-CN"/>
+          </a:p>
+          <a:p>
+            <a:pPr lvl="1"/>
+            <a:r>
+              <a:rPr lang="en-US" altLang="zh-CN"/>
+              <a:t>https://gradle.org/releases/</a:t>
+            </a:r>
+            <a:endParaRPr lang="en-US" altLang="zh-CN"/>
+          </a:p>
+          <a:p>
+            <a:pPr lvl="1"/>
+            <a:r>
+              <a:rPr lang="en-US" altLang="zh-CN"/>
+              <a:t>4.2.2 </a:t>
+            </a:r>
+            <a:r>
+              <a:rPr lang="zh-CN" altLang="en-US"/>
+              <a:t>（</a:t>
+            </a:r>
+            <a:r>
+              <a:rPr lang="en-US" altLang="zh-CN"/>
+              <a:t>Android SDK 30.0.2 (R Android 11))</a:t>
+            </a:r>
+            <a:endParaRPr lang="en-US" altLang="zh-CN"/>
+          </a:p>
+          <a:p>
+            <a:pPr lvl="1"/>
+            <a:r>
+              <a:rPr lang="en-US" altLang="zh-CN"/>
+              <a:t>4.1.0 (Android SDK 29.0.2 (Q Android 10))</a:t>
+            </a:r>
+            <a:endParaRPr lang="en-US" altLang="zh-CN"/>
+          </a:p>
+        </p:txBody>
+      </p:sp>
+      <p:sp>
+        <p:nvSpPr>
+          <p:cNvPr id="4" name="文本框 3"/>
+          <p:cNvSpPr txBox="1"/>
+          <p:nvPr/>
+        </p:nvSpPr>
+        <p:spPr>
+          <a:xfrm>
+            <a:off x="7409180" y="1082040"/>
+            <a:ext cx="4375150" cy="5564505"/>
+          </a:xfrm>
+          <a:prstGeom prst="rect">
+            <a:avLst/>
+          </a:prstGeom>
+          <a:noFill/>
+          <a:ln>
+            <a:solidFill>
+              <a:srgbClr val="C00000"/>
+            </a:solidFill>
+          </a:ln>
+        </p:spPr>
+        <p:txBody>
+          <a:bodyPr wrap="square" rtlCol="0">
+            <a:noAutofit/>
+          </a:bodyPr>
+          <a:p>
+            <a:pPr algn="l"/>
+            <a:r>
+              <a:rPr lang="zh-CN" altLang="en-US" sz="1000">
+                <a:solidFill>
+                  <a:schemeClr val="tx1"/>
+                </a:solidFill>
+                <a:effectLst/>
+                <a:latin typeface="+mn-lt"/>
+                <a:cs typeface="+mn-lt"/>
+              </a:rPr>
+              <a:t>// Top-level build file where you can add configuration options common to all sub-projects/modules.</a:t>
+            </a:r>
+            <a:endParaRPr lang="zh-CN" altLang="en-US" sz="1000">
+              <a:solidFill>
+                <a:schemeClr val="tx1"/>
+              </a:solidFill>
+              <a:effectLst/>
+              <a:latin typeface="+mn-lt"/>
+              <a:cs typeface="+mn-lt"/>
+            </a:endParaRPr>
+          </a:p>
+          <a:p>
+            <a:pPr algn="l"/>
+            <a:r>
+              <a:rPr lang="zh-CN" altLang="en-US" sz="1000">
+                <a:solidFill>
+                  <a:schemeClr val="tx1"/>
+                </a:solidFill>
+                <a:effectLst/>
+                <a:latin typeface="+mn-lt"/>
+                <a:cs typeface="+mn-lt"/>
+              </a:rPr>
+              <a:t>buildscript {</a:t>
+            </a:r>
+            <a:endParaRPr lang="zh-CN" altLang="en-US" sz="1000">
+              <a:solidFill>
+                <a:schemeClr val="tx1"/>
+              </a:solidFill>
+              <a:effectLst/>
+              <a:latin typeface="+mn-lt"/>
+              <a:cs typeface="+mn-lt"/>
+            </a:endParaRPr>
+          </a:p>
+          <a:p>
+            <a:pPr algn="l"/>
+            <a:r>
+              <a:rPr lang="zh-CN" altLang="en-US" sz="1000">
+                <a:solidFill>
+                  <a:schemeClr val="tx1"/>
+                </a:solidFill>
+                <a:effectLst/>
+                <a:latin typeface="+mn-lt"/>
+                <a:cs typeface="+mn-lt"/>
+              </a:rPr>
+              <a:t>    ext {</a:t>
+            </a:r>
+            <a:endParaRPr lang="zh-CN" altLang="en-US" sz="1000">
+              <a:solidFill>
+                <a:schemeClr val="tx1"/>
+              </a:solidFill>
+              <a:effectLst/>
+              <a:latin typeface="+mn-lt"/>
+              <a:cs typeface="+mn-lt"/>
+            </a:endParaRPr>
+          </a:p>
+          <a:p>
+            <a:pPr algn="l"/>
+            <a:r>
+              <a:rPr lang="zh-CN" altLang="en-US" sz="1000">
+                <a:solidFill>
+                  <a:schemeClr val="tx1"/>
+                </a:solidFill>
+                <a:effectLst/>
+                <a:latin typeface="+mn-lt"/>
+                <a:cs typeface="+mn-lt"/>
+              </a:rPr>
+              <a:t>        kotlin_version = '1.3.72'</a:t>
+            </a:r>
+            <a:endParaRPr lang="zh-CN" altLang="en-US" sz="1000">
+              <a:solidFill>
+                <a:schemeClr val="tx1"/>
+              </a:solidFill>
+              <a:effectLst/>
+              <a:latin typeface="+mn-lt"/>
+              <a:cs typeface="+mn-lt"/>
+            </a:endParaRPr>
+          </a:p>
+          <a:p>
+            <a:pPr algn="l"/>
+            <a:r>
+              <a:rPr lang="zh-CN" altLang="en-US" sz="1000">
+                <a:solidFill>
+                  <a:schemeClr val="tx1"/>
+                </a:solidFill>
+                <a:effectLst/>
+                <a:latin typeface="+mn-lt"/>
+                <a:cs typeface="+mn-lt"/>
+              </a:rPr>
+              <a:t>    }</a:t>
+            </a:r>
+            <a:endParaRPr lang="zh-CN" altLang="en-US" sz="1000">
+              <a:solidFill>
+                <a:schemeClr val="tx1"/>
+              </a:solidFill>
+              <a:effectLst/>
+              <a:latin typeface="+mn-lt"/>
+              <a:cs typeface="+mn-lt"/>
+            </a:endParaRPr>
+          </a:p>
+          <a:p>
+            <a:pPr algn="l"/>
+            <a:r>
+              <a:rPr lang="zh-CN" altLang="en-US" sz="1000">
+                <a:solidFill>
+                  <a:schemeClr val="tx1"/>
+                </a:solidFill>
+                <a:effectLst/>
+                <a:latin typeface="+mn-lt"/>
+                <a:cs typeface="+mn-lt"/>
+              </a:rPr>
+              <a:t>    repositories {</a:t>
+            </a:r>
+            <a:endParaRPr lang="zh-CN" altLang="en-US" sz="1000">
+              <a:solidFill>
+                <a:schemeClr val="tx1"/>
+              </a:solidFill>
+              <a:effectLst/>
+              <a:latin typeface="+mn-lt"/>
+              <a:cs typeface="+mn-lt"/>
+            </a:endParaRPr>
+          </a:p>
+          <a:p>
+            <a:pPr algn="l"/>
+            <a:r>
+              <a:rPr lang="zh-CN" altLang="en-US" sz="1000">
+                <a:solidFill>
+                  <a:srgbClr val="FF0000"/>
+                </a:solidFill>
+                <a:effectLst/>
+                <a:latin typeface="+mn-lt"/>
+                <a:cs typeface="+mn-lt"/>
+              </a:rPr>
+              <a:t>        maven { url 'https://maven.aliyun.com/repository/public/' }</a:t>
+            </a:r>
+            <a:endParaRPr lang="zh-CN" altLang="en-US" sz="1000">
+              <a:solidFill>
+                <a:srgbClr val="FF0000"/>
+              </a:solidFill>
+              <a:effectLst/>
+              <a:latin typeface="+mn-lt"/>
+              <a:cs typeface="+mn-lt"/>
+            </a:endParaRPr>
+          </a:p>
+          <a:p>
+            <a:pPr algn="l"/>
+            <a:r>
+              <a:rPr lang="zh-CN" altLang="en-US" sz="1000">
+                <a:solidFill>
+                  <a:srgbClr val="FF0000"/>
+                </a:solidFill>
+                <a:effectLst/>
+                <a:latin typeface="+mn-lt"/>
+                <a:cs typeface="+mn-lt"/>
+              </a:rPr>
+              <a:t>        maven { url 'https://maven.aliyun.com/repository/gradle-plugin' }</a:t>
+            </a:r>
+            <a:endParaRPr lang="zh-CN" altLang="en-US" sz="1000">
+              <a:solidFill>
+                <a:srgbClr val="FF0000"/>
+              </a:solidFill>
+              <a:effectLst/>
+              <a:latin typeface="+mn-lt"/>
+              <a:cs typeface="+mn-lt"/>
+            </a:endParaRPr>
+          </a:p>
+          <a:p>
+            <a:pPr algn="l"/>
+            <a:r>
+              <a:rPr lang="zh-CN" altLang="en-US" sz="1000">
+                <a:solidFill>
+                  <a:srgbClr val="FF0000"/>
+                </a:solidFill>
+                <a:effectLst/>
+                <a:latin typeface="+mn-lt"/>
+                <a:cs typeface="+mn-lt"/>
+              </a:rPr>
+              <a:t>        maven { url 'https://maven.aliyun.com/repository/central' }</a:t>
+            </a:r>
+            <a:endParaRPr lang="zh-CN" altLang="en-US" sz="1000">
+              <a:solidFill>
+                <a:srgbClr val="FF0000"/>
+              </a:solidFill>
+              <a:effectLst/>
+              <a:latin typeface="+mn-lt"/>
+              <a:cs typeface="+mn-lt"/>
+            </a:endParaRPr>
+          </a:p>
+          <a:p>
+            <a:pPr algn="l"/>
+            <a:r>
+              <a:rPr lang="zh-CN" altLang="en-US" sz="1000">
+                <a:solidFill>
+                  <a:srgbClr val="FF0000"/>
+                </a:solidFill>
+                <a:effectLst/>
+                <a:latin typeface="+mn-lt"/>
+                <a:cs typeface="+mn-lt"/>
+              </a:rPr>
+              <a:t>        maven{url "https://jitpack.io"}</a:t>
+            </a:r>
+            <a:endParaRPr lang="zh-CN" altLang="en-US" sz="1000">
+              <a:solidFill>
+                <a:srgbClr val="FF0000"/>
+              </a:solidFill>
+              <a:effectLst/>
+              <a:latin typeface="+mn-lt"/>
+              <a:cs typeface="+mn-lt"/>
+            </a:endParaRPr>
+          </a:p>
+          <a:p>
+            <a:pPr algn="l"/>
+            <a:r>
+              <a:rPr lang="zh-CN" altLang="en-US" sz="1000">
+                <a:solidFill>
+                  <a:schemeClr val="tx1"/>
+                </a:solidFill>
+                <a:effectLst/>
+                <a:latin typeface="+mn-lt"/>
+                <a:cs typeface="+mn-lt"/>
+              </a:rPr>
+              <a:t>        google()</a:t>
+            </a:r>
+            <a:endParaRPr lang="zh-CN" altLang="en-US" sz="1000">
+              <a:solidFill>
+                <a:schemeClr val="tx1"/>
+              </a:solidFill>
+              <a:effectLst/>
+              <a:latin typeface="+mn-lt"/>
+              <a:cs typeface="+mn-lt"/>
+            </a:endParaRPr>
+          </a:p>
+          <a:p>
+            <a:pPr algn="l"/>
+            <a:r>
+              <a:rPr lang="zh-CN" altLang="en-US" sz="1000">
+                <a:solidFill>
+                  <a:schemeClr val="tx1"/>
+                </a:solidFill>
+                <a:effectLst/>
+                <a:latin typeface="+mn-lt"/>
+                <a:cs typeface="+mn-lt"/>
+              </a:rPr>
+              <a:t>//        jcenter()</a:t>
+            </a:r>
+            <a:endParaRPr lang="zh-CN" altLang="en-US" sz="1000">
+              <a:solidFill>
+                <a:schemeClr val="tx1"/>
+              </a:solidFill>
+              <a:effectLst/>
+              <a:latin typeface="+mn-lt"/>
+              <a:cs typeface="+mn-lt"/>
+            </a:endParaRPr>
+          </a:p>
+          <a:p>
+            <a:pPr algn="l"/>
+            <a:r>
+              <a:rPr lang="zh-CN" altLang="en-US" sz="1000">
+                <a:solidFill>
+                  <a:schemeClr val="tx1"/>
+                </a:solidFill>
+                <a:effectLst/>
+                <a:latin typeface="+mn-lt"/>
+                <a:cs typeface="+mn-lt"/>
+              </a:rPr>
+              <a:t>    }</a:t>
+            </a:r>
+            <a:endParaRPr lang="zh-CN" altLang="en-US" sz="1000">
+              <a:solidFill>
+                <a:schemeClr val="tx1"/>
+              </a:solidFill>
+              <a:effectLst/>
+              <a:latin typeface="+mn-lt"/>
+              <a:cs typeface="+mn-lt"/>
+            </a:endParaRPr>
+          </a:p>
+          <a:p>
+            <a:pPr algn="l"/>
+            <a:r>
+              <a:rPr lang="zh-CN" altLang="en-US" sz="1000">
+                <a:solidFill>
+                  <a:schemeClr val="tx1"/>
+                </a:solidFill>
+                <a:effectLst/>
+                <a:latin typeface="+mn-lt"/>
+                <a:cs typeface="+mn-lt"/>
+              </a:rPr>
+              <a:t>    dependencies {</a:t>
+            </a:r>
+            <a:endParaRPr lang="zh-CN" altLang="en-US" sz="1000">
+              <a:solidFill>
+                <a:schemeClr val="tx1"/>
+              </a:solidFill>
+              <a:effectLst/>
+              <a:latin typeface="+mn-lt"/>
+              <a:cs typeface="+mn-lt"/>
+            </a:endParaRPr>
+          </a:p>
+          <a:p>
+            <a:pPr algn="l"/>
+            <a:r>
+              <a:rPr lang="zh-CN" altLang="en-US" sz="1000">
+                <a:solidFill>
+                  <a:schemeClr val="tx1"/>
+                </a:solidFill>
+                <a:effectLst/>
+                <a:latin typeface="+mn-lt"/>
+                <a:cs typeface="+mn-lt"/>
+              </a:rPr>
+              <a:t>        classpath "com.android.tools.build:gradle:4.0.1"</a:t>
+            </a:r>
+            <a:endParaRPr lang="zh-CN" altLang="en-US" sz="1000">
+              <a:solidFill>
+                <a:schemeClr val="tx1"/>
+              </a:solidFill>
+              <a:effectLst/>
+              <a:latin typeface="+mn-lt"/>
+              <a:cs typeface="+mn-lt"/>
+            </a:endParaRPr>
+          </a:p>
+          <a:p>
+            <a:pPr algn="l"/>
+            <a:r>
+              <a:rPr lang="zh-CN" altLang="en-US" sz="1000">
+                <a:solidFill>
+                  <a:schemeClr val="tx1"/>
+                </a:solidFill>
+                <a:effectLst/>
+                <a:latin typeface="+mn-lt"/>
+                <a:cs typeface="+mn-lt"/>
+              </a:rPr>
+              <a:t>        classpath "org.jetbrains.kotlin:kotlin-gradle-plugin:$kotlin_version"</a:t>
+            </a:r>
+            <a:endParaRPr lang="zh-CN" altLang="en-US" sz="1000">
+              <a:solidFill>
+                <a:schemeClr val="tx1"/>
+              </a:solidFill>
+              <a:effectLst/>
+              <a:latin typeface="+mn-lt"/>
+              <a:cs typeface="+mn-lt"/>
+            </a:endParaRPr>
+          </a:p>
+          <a:p>
+            <a:pPr algn="l"/>
+            <a:endParaRPr lang="zh-CN" altLang="en-US" sz="1000">
+              <a:solidFill>
+                <a:schemeClr val="tx1"/>
+              </a:solidFill>
+              <a:effectLst/>
+              <a:latin typeface="+mn-lt"/>
+              <a:cs typeface="+mn-lt"/>
+            </a:endParaRPr>
+          </a:p>
+          <a:p>
+            <a:pPr algn="l"/>
+            <a:r>
+              <a:rPr lang="zh-CN" altLang="en-US" sz="1000">
+                <a:solidFill>
+                  <a:schemeClr val="tx1"/>
+                </a:solidFill>
+                <a:effectLst/>
+                <a:latin typeface="+mn-lt"/>
+                <a:cs typeface="+mn-lt"/>
+              </a:rPr>
+              <a:t>        // NOTE: Do not place your application dependencies here; they belong</a:t>
+            </a:r>
+            <a:endParaRPr lang="zh-CN" altLang="en-US" sz="1000">
+              <a:solidFill>
+                <a:schemeClr val="tx1"/>
+              </a:solidFill>
+              <a:effectLst/>
+              <a:latin typeface="+mn-lt"/>
+              <a:cs typeface="+mn-lt"/>
+            </a:endParaRPr>
+          </a:p>
+          <a:p>
+            <a:pPr algn="l"/>
+            <a:r>
+              <a:rPr lang="zh-CN" altLang="en-US" sz="1000">
+                <a:solidFill>
+                  <a:schemeClr val="tx1"/>
+                </a:solidFill>
+                <a:effectLst/>
+                <a:latin typeface="+mn-lt"/>
+                <a:cs typeface="+mn-lt"/>
+              </a:rPr>
+              <a:t>        // in the individual module build.gradle files</a:t>
+            </a:r>
+            <a:endParaRPr lang="zh-CN" altLang="en-US" sz="1000">
+              <a:solidFill>
+                <a:schemeClr val="tx1"/>
+              </a:solidFill>
+              <a:effectLst/>
+              <a:latin typeface="+mn-lt"/>
+              <a:cs typeface="+mn-lt"/>
+            </a:endParaRPr>
+          </a:p>
+          <a:p>
+            <a:pPr algn="l"/>
+            <a:r>
+              <a:rPr lang="zh-CN" altLang="en-US" sz="1000">
+                <a:solidFill>
+                  <a:schemeClr val="tx1"/>
+                </a:solidFill>
+                <a:effectLst/>
+                <a:latin typeface="+mn-lt"/>
+                <a:cs typeface="+mn-lt"/>
+              </a:rPr>
+              <a:t>    }</a:t>
+            </a:r>
+            <a:endParaRPr lang="zh-CN" altLang="en-US" sz="1000">
+              <a:solidFill>
+                <a:schemeClr val="tx1"/>
+              </a:solidFill>
+              <a:effectLst/>
+              <a:latin typeface="+mn-lt"/>
+              <a:cs typeface="+mn-lt"/>
+            </a:endParaRPr>
+          </a:p>
+          <a:p>
+            <a:pPr algn="l"/>
+            <a:r>
+              <a:rPr lang="zh-CN" altLang="en-US" sz="1000">
+                <a:solidFill>
+                  <a:schemeClr val="tx1"/>
+                </a:solidFill>
+                <a:effectLst/>
+                <a:latin typeface="+mn-lt"/>
+                <a:cs typeface="+mn-lt"/>
+              </a:rPr>
+              <a:t>}</a:t>
+            </a:r>
+            <a:endParaRPr lang="zh-CN" altLang="en-US" sz="1000">
+              <a:solidFill>
+                <a:schemeClr val="tx1"/>
+              </a:solidFill>
+              <a:effectLst/>
+              <a:latin typeface="+mn-lt"/>
+              <a:cs typeface="+mn-lt"/>
+            </a:endParaRPr>
+          </a:p>
+          <a:p>
+            <a:pPr algn="l"/>
+            <a:endParaRPr lang="zh-CN" altLang="en-US" sz="1000">
+              <a:solidFill>
+                <a:schemeClr val="tx1"/>
+              </a:solidFill>
+              <a:effectLst/>
+              <a:latin typeface="+mn-lt"/>
+              <a:cs typeface="+mn-lt"/>
+            </a:endParaRPr>
+          </a:p>
+          <a:p>
+            <a:pPr algn="l"/>
+            <a:r>
+              <a:rPr lang="zh-CN" altLang="en-US" sz="1000">
+                <a:solidFill>
+                  <a:schemeClr val="tx1"/>
+                </a:solidFill>
+                <a:effectLst/>
+                <a:latin typeface="+mn-lt"/>
+                <a:cs typeface="+mn-lt"/>
+              </a:rPr>
+              <a:t>allprojects {</a:t>
+            </a:r>
+            <a:endParaRPr lang="zh-CN" altLang="en-US" sz="1000">
+              <a:solidFill>
+                <a:schemeClr val="tx1"/>
+              </a:solidFill>
+              <a:effectLst/>
+              <a:latin typeface="+mn-lt"/>
+              <a:cs typeface="+mn-lt"/>
+            </a:endParaRPr>
+          </a:p>
+          <a:p>
+            <a:pPr algn="l"/>
+            <a:r>
+              <a:rPr lang="zh-CN" altLang="en-US" sz="1000">
+                <a:solidFill>
+                  <a:schemeClr val="tx1"/>
+                </a:solidFill>
+                <a:effectLst/>
+                <a:latin typeface="+mn-lt"/>
+                <a:cs typeface="+mn-lt"/>
+              </a:rPr>
+              <a:t>    repositories {</a:t>
+            </a:r>
+            <a:endParaRPr lang="zh-CN" altLang="en-US" sz="1000">
+              <a:solidFill>
+                <a:schemeClr val="tx1"/>
+              </a:solidFill>
+              <a:effectLst/>
+              <a:latin typeface="+mn-lt"/>
+              <a:cs typeface="+mn-lt"/>
+            </a:endParaRPr>
+          </a:p>
+          <a:p>
+            <a:pPr algn="l"/>
+            <a:r>
+              <a:rPr lang="zh-CN" altLang="en-US" sz="1000">
+                <a:solidFill>
+                  <a:srgbClr val="FF0000"/>
+                </a:solidFill>
+                <a:effectLst/>
+                <a:latin typeface="+mn-lt"/>
+                <a:cs typeface="+mn-lt"/>
+              </a:rPr>
+              <a:t>        maven { url 'https://maven.aliyun.com/repository/public/' }</a:t>
+            </a:r>
+            <a:endParaRPr lang="zh-CN" altLang="en-US" sz="1000">
+              <a:solidFill>
+                <a:srgbClr val="FF0000"/>
+              </a:solidFill>
+              <a:effectLst/>
+              <a:latin typeface="+mn-lt"/>
+              <a:cs typeface="+mn-lt"/>
+            </a:endParaRPr>
+          </a:p>
+          <a:p>
+            <a:pPr algn="l"/>
+            <a:r>
+              <a:rPr lang="zh-CN" altLang="en-US" sz="1000">
+                <a:solidFill>
+                  <a:srgbClr val="FF0000"/>
+                </a:solidFill>
+                <a:effectLst/>
+                <a:latin typeface="+mn-lt"/>
+                <a:cs typeface="+mn-lt"/>
+              </a:rPr>
+              <a:t>        maven { url 'https://maven.aliyun.com/repository/central' }    </a:t>
+            </a:r>
+            <a:r>
+              <a:rPr lang="zh-CN" altLang="en-US" sz="1000">
+                <a:solidFill>
+                  <a:schemeClr val="tx1"/>
+                </a:solidFill>
+                <a:effectLst/>
+                <a:latin typeface="+mn-lt"/>
+                <a:cs typeface="+mn-lt"/>
+              </a:rPr>
+              <a:t>    </a:t>
+            </a:r>
+            <a:endParaRPr lang="zh-CN" altLang="en-US" sz="1000">
+              <a:solidFill>
+                <a:schemeClr val="tx1"/>
+              </a:solidFill>
+              <a:effectLst/>
+              <a:latin typeface="+mn-lt"/>
+              <a:cs typeface="+mn-lt"/>
+            </a:endParaRPr>
+          </a:p>
+          <a:p>
+            <a:pPr algn="l"/>
+            <a:r>
+              <a:rPr lang="en-US" altLang="zh-CN" sz="1000">
+                <a:solidFill>
+                  <a:schemeClr val="tx1"/>
+                </a:solidFill>
+                <a:effectLst/>
+                <a:latin typeface="+mn-lt"/>
+                <a:cs typeface="+mn-lt"/>
+              </a:rPr>
+              <a:t>        g</a:t>
+            </a:r>
+            <a:r>
+              <a:rPr lang="zh-CN" altLang="en-US" sz="1000">
+                <a:solidFill>
+                  <a:schemeClr val="tx1"/>
+                </a:solidFill>
+                <a:effectLst/>
+                <a:latin typeface="+mn-lt"/>
+                <a:cs typeface="+mn-lt"/>
+              </a:rPr>
+              <a:t>oogle()</a:t>
+            </a:r>
+            <a:endParaRPr lang="zh-CN" altLang="en-US" sz="1000">
+              <a:solidFill>
+                <a:schemeClr val="tx1"/>
+              </a:solidFill>
+              <a:effectLst/>
+              <a:latin typeface="+mn-lt"/>
+              <a:cs typeface="+mn-lt"/>
+            </a:endParaRPr>
+          </a:p>
+          <a:p>
+            <a:pPr algn="l"/>
+            <a:r>
+              <a:rPr lang="zh-CN" altLang="en-US" sz="1000">
+                <a:solidFill>
+                  <a:schemeClr val="tx1"/>
+                </a:solidFill>
+                <a:effectLst/>
+                <a:latin typeface="+mn-lt"/>
+                <a:cs typeface="+mn-lt"/>
+              </a:rPr>
+              <a:t>//        jcenter()</a:t>
+            </a:r>
+            <a:endParaRPr lang="zh-CN" altLang="en-US" sz="1000">
+              <a:solidFill>
+                <a:schemeClr val="tx1"/>
+              </a:solidFill>
+              <a:effectLst/>
+              <a:latin typeface="+mn-lt"/>
+              <a:cs typeface="+mn-lt"/>
+            </a:endParaRPr>
+          </a:p>
+          <a:p>
+            <a:pPr algn="l"/>
+            <a:r>
+              <a:rPr lang="zh-CN" altLang="en-US" sz="1000">
+                <a:solidFill>
+                  <a:schemeClr val="tx1"/>
+                </a:solidFill>
+                <a:effectLst/>
+                <a:latin typeface="+mn-lt"/>
+                <a:cs typeface="+mn-lt"/>
+              </a:rPr>
+              <a:t>    }</a:t>
+            </a:r>
+            <a:endParaRPr lang="zh-CN" altLang="en-US" sz="1000">
+              <a:solidFill>
+                <a:schemeClr val="tx1"/>
+              </a:solidFill>
+              <a:effectLst/>
+              <a:latin typeface="+mn-lt"/>
+              <a:cs typeface="+mn-lt"/>
+            </a:endParaRPr>
+          </a:p>
+          <a:p>
+            <a:pPr algn="l"/>
+            <a:r>
+              <a:rPr lang="zh-CN" altLang="en-US" sz="1000">
+                <a:solidFill>
+                  <a:schemeClr val="tx1"/>
+                </a:solidFill>
+                <a:effectLst/>
+                <a:latin typeface="+mn-lt"/>
+                <a:cs typeface="+mn-lt"/>
+              </a:rPr>
+              <a:t>}</a:t>
+            </a:r>
+            <a:endParaRPr lang="zh-CN" altLang="en-US" sz="1000">
+              <a:solidFill>
+                <a:schemeClr val="tx1"/>
+              </a:solidFill>
+              <a:effectLst/>
+              <a:latin typeface="+mn-lt"/>
+              <a:cs typeface="+mn-lt"/>
+            </a:endParaRPr>
+          </a:p>
+          <a:p>
+            <a:pPr algn="l"/>
+            <a:endParaRPr lang="zh-CN" altLang="en-US" sz="1000">
+              <a:solidFill>
+                <a:schemeClr val="tx1"/>
+              </a:solidFill>
+              <a:effectLst/>
+              <a:latin typeface="+mn-lt"/>
+              <a:cs typeface="+mn-lt"/>
+            </a:endParaRPr>
+          </a:p>
+          <a:p>
+            <a:pPr algn="l"/>
+            <a:r>
+              <a:rPr lang="zh-CN" altLang="en-US" sz="1000">
+                <a:solidFill>
+                  <a:schemeClr val="tx1"/>
+                </a:solidFill>
+                <a:effectLst/>
+                <a:latin typeface="+mn-lt"/>
+                <a:cs typeface="+mn-lt"/>
+              </a:rPr>
+              <a:t>task clean(type: Delete) {</a:t>
+            </a:r>
+            <a:endParaRPr lang="zh-CN" altLang="en-US" sz="1000">
+              <a:solidFill>
+                <a:schemeClr val="tx1"/>
+              </a:solidFill>
+              <a:effectLst/>
+              <a:latin typeface="+mn-lt"/>
+              <a:cs typeface="+mn-lt"/>
+            </a:endParaRPr>
+          </a:p>
+          <a:p>
+            <a:pPr algn="l"/>
+            <a:r>
+              <a:rPr lang="zh-CN" altLang="en-US" sz="1000">
+                <a:solidFill>
+                  <a:schemeClr val="tx1"/>
+                </a:solidFill>
+                <a:effectLst/>
+                <a:latin typeface="+mn-lt"/>
+                <a:cs typeface="+mn-lt"/>
+              </a:rPr>
+              <a:t>    delete rootProject.buildDir</a:t>
+            </a:r>
+            <a:endParaRPr lang="zh-CN" altLang="en-US" sz="1000">
+              <a:solidFill>
+                <a:schemeClr val="tx1"/>
+              </a:solidFill>
+              <a:effectLst/>
+              <a:latin typeface="+mn-lt"/>
+              <a:cs typeface="+mn-lt"/>
+            </a:endParaRPr>
+          </a:p>
+          <a:p>
+            <a:pPr algn="l"/>
+            <a:r>
+              <a:rPr lang="zh-CN" altLang="en-US" sz="1000">
+                <a:solidFill>
+                  <a:schemeClr val="tx1"/>
+                </a:solidFill>
+                <a:effectLst/>
+                <a:latin typeface="+mn-lt"/>
+                <a:cs typeface="+mn-lt"/>
+              </a:rPr>
+              <a:t>}</a:t>
+            </a:r>
+            <a:endParaRPr lang="zh-CN" altLang="en-US" sz="1000">
+              <a:solidFill>
+                <a:schemeClr val="tx1"/>
+              </a:solidFill>
+              <a:effectLst/>
+              <a:latin typeface="+mn-lt"/>
+              <a:cs typeface="+mn-lt"/>
+            </a:endParaRPr>
+          </a:p>
+        </p:txBody>
+      </p:sp>
+    </p:spTree>
+    <p:custDataLst>
+      <p:tags r:id="rId1"/>
+    </p:custDataLst>
+  </p:cSld>
+  <p:clrMapOvr>
+    <a:masterClrMapping/>
+  </p:clrMapOvr>
+</p:sld>
+</file>
+
+<file path=ppt/slides/slide5.xml><?xml version="1.0" encoding="utf-8"?>
+<p:sld xmlns:a="http://schemas.openxmlformats.org/drawingml/2006/main" xmlns:r="http://schemas.openxmlformats.org/officeDocument/2006/relationships" xmlns:p="http://schemas.openxmlformats.org/presentationml/2006/main">
+  <p:cSld>
+    <p:spTree>
+      <p:nvGrpSpPr>
+        <p:cNvPr id="1" name=""/>
+        <p:cNvGrpSpPr/>
+        <p:nvPr/>
+      </p:nvGrpSpPr>
+      <p:grpSpPr/>
+      <p:sp>
+        <p:nvSpPr>
+          <p:cNvPr id="2" name="标题 1"/>
+          <p:cNvSpPr>
+            <a:spLocks noGrp="1"/>
+          </p:cNvSpPr>
+          <p:nvPr>
+            <p:ph type="title"/>
+          </p:nvPr>
+        </p:nvSpPr>
+        <p:spPr/>
+        <p:txBody>
+          <a:bodyPr/>
+          <a:p>
+            <a:r>
+              <a:rPr lang="en-US" altLang="zh-CN"/>
+              <a:t>Issues &amp; Solutions</a:t>
+            </a:r>
+            <a:endParaRPr lang="en-US" altLang="zh-CN"/>
+          </a:p>
+        </p:txBody>
+      </p:sp>
+      <p:sp>
+        <p:nvSpPr>
+          <p:cNvPr id="3" name="内容占位符 2"/>
+          <p:cNvSpPr>
+            <a:spLocks noGrp="1"/>
+          </p:cNvSpPr>
+          <p:nvPr>
+            <p:ph idx="1"/>
+          </p:nvPr>
+        </p:nvSpPr>
+        <p:spPr>
+          <a:xfrm>
+            <a:off x="838200" y="1211580"/>
+            <a:ext cx="6216650" cy="4549140"/>
+          </a:xfrm>
+        </p:spPr>
+        <p:txBody>
+          <a:bodyPr/>
+          <a:p>
+            <a:pPr lvl="0"/>
+            <a:r>
+              <a:rPr lang="en-US" altLang="zh-CN"/>
+              <a:t>unable to find gradle tasks to build</a:t>
+            </a:r>
+            <a:endParaRPr lang="en-US" altLang="zh-CN"/>
+          </a:p>
+          <a:p>
+            <a:pPr lvl="1"/>
+            <a:r>
+              <a:rPr lang="en-US" altLang="zh-CN"/>
+              <a:t>$HOME\.gradle\wrapper\dists\</a:t>
+            </a:r>
+            <a:endParaRPr lang="en-US" altLang="zh-CN"/>
+          </a:p>
+          <a:p>
+            <a:pPr lvl="0"/>
+            <a:r>
+              <a:rPr lang="zh-CN" altLang="en-US"/>
+              <a:t>控制台乱码</a:t>
+            </a:r>
+            <a:endParaRPr lang="zh-CN" altLang="en-US"/>
+          </a:p>
+          <a:p>
+            <a:pPr lvl="1"/>
+            <a:r>
+              <a:rPr lang="zh-CN" altLang="en-US"/>
+              <a:t>在help中找到Edit Custom VM Options... ，在文件中添加</a:t>
+            </a:r>
+            <a:r>
+              <a:rPr lang="en-US" altLang="zh-CN"/>
+              <a:t>”</a:t>
+            </a:r>
+            <a:r>
+              <a:rPr lang="zh-CN" altLang="en-US"/>
+              <a:t>-Dfile.encoding=UTF-8</a:t>
+            </a:r>
+            <a:r>
+              <a:rPr lang="en-US" altLang="zh-CN"/>
+              <a:t>”</a:t>
+            </a:r>
+            <a:endParaRPr lang="en-US" altLang="zh-CN"/>
+          </a:p>
+        </p:txBody>
+      </p:sp>
+    </p:spTree>
+    <p:custDataLst>
+      <p:tags r:id="rId1"/>
+    </p:custDataLst>
+  </p:cSld>
+  <p:clrMapOvr>
+    <a:masterClrMapping/>
+  </p:clrMapOvr>
+</p:sld>
+</file>
+
+<file path=ppt/slides/slide6.xml><?xml version="1.0" encoding="utf-8"?>
 <p:sld xmlns:a="http://schemas.openxmlformats.org/drawingml/2006/main" xmlns:r="http://schemas.openxmlformats.org/officeDocument/2006/relationships" xmlns:p="http://schemas.openxmlformats.org/presentationml/2006/main">
   <p:cSld>
     <p:spTree>
@@ -4736,7 +6591,7 @@
 </p:sld>
 </file>
 
-<file path=ppt/slides/slide4.xml><?xml version="1.0" encoding="utf-8"?>
+<file path=ppt/slides/slide7.xml><?xml version="1.0" encoding="utf-8"?>
 <p:sld xmlns:a="http://schemas.openxmlformats.org/drawingml/2006/main" xmlns:r="http://schemas.openxmlformats.org/officeDocument/2006/relationships" xmlns:p="http://schemas.openxmlformats.org/presentationml/2006/main">
   <p:cSld>
     <p:spTree>
@@ -4944,7 +6799,7 @@
 </p:sld>
 </file>
 
-<file path=ppt/slides/slide5.xml><?xml version="1.0" encoding="utf-8"?>
+<file path=ppt/slides/slide8.xml><?xml version="1.0" encoding="utf-8"?>
 <p:sld xmlns:a="http://schemas.openxmlformats.org/drawingml/2006/main" xmlns:r="http://schemas.openxmlformats.org/officeDocument/2006/relationships" xmlns:p="http://schemas.openxmlformats.org/presentationml/2006/main">
   <p:cSld>
     <p:spTree>
@@ -5452,7 +7307,7 @@
 </p:sld>
 </file>
 
-<file path=ppt/slides/slide6.xml><?xml version="1.0" encoding="utf-8"?>
+<file path=ppt/slides/slide9.xml><?xml version="1.0" encoding="utf-8"?>
 <p:sld xmlns:a="http://schemas.openxmlformats.org/drawingml/2006/main" xmlns:r="http://schemas.openxmlformats.org/officeDocument/2006/relationships" xmlns:p="http://schemas.openxmlformats.org/presentationml/2006/main">
   <p:cSld>
     <p:spTree>
@@ -5548,278 +7403,6 @@
     </p:spTree>
     <p:custDataLst>
       <p:tags r:id="rId2"/>
-    </p:custDataLst>
-  </p:cSld>
-  <p:clrMapOvr>
-    <a:masterClrMapping/>
-  </p:clrMapOvr>
-</p:sld>
-</file>
-
-<file path=ppt/slides/slide7.xml><?xml version="1.0" encoding="utf-8"?>
-<p:sld xmlns:a="http://schemas.openxmlformats.org/drawingml/2006/main" xmlns:r="http://schemas.openxmlformats.org/officeDocument/2006/relationships" xmlns:p="http://schemas.openxmlformats.org/presentationml/2006/main">
-  <p:cSld>
-    <p:spTree>
-      <p:nvGrpSpPr>
-        <p:cNvPr id="1" name=""/>
-        <p:cNvGrpSpPr/>
-        <p:nvPr/>
-      </p:nvGrpSpPr>
-      <p:grpSpPr/>
-      <p:sp>
-        <p:nvSpPr>
-          <p:cNvPr id="4" name="标题 3"/>
-          <p:cNvSpPr>
-            <a:spLocks noGrp="1"/>
-          </p:cNvSpPr>
-          <p:nvPr>
-            <p:ph type="title"/>
-          </p:nvPr>
-        </p:nvSpPr>
-        <p:spPr/>
-        <p:txBody>
-          <a:bodyPr/>
-          <a:p>
-            <a:r>
-              <a:rPr lang="en-US" altLang="zh-CN"/>
-              <a:t>SDK Build Tools</a:t>
-            </a:r>
-            <a:endParaRPr lang="en-US" altLang="zh-CN"/>
-          </a:p>
-        </p:txBody>
-      </p:sp>
-      <p:sp>
-        <p:nvSpPr>
-          <p:cNvPr id="5" name="内容占位符 4"/>
-          <p:cNvSpPr>
-            <a:spLocks noGrp="1"/>
-          </p:cNvSpPr>
-          <p:nvPr>
-            <p:ph idx="1"/>
-          </p:nvPr>
-        </p:nvSpPr>
-        <p:spPr/>
-        <p:txBody>
-          <a:bodyPr>
-            <a:normAutofit lnSpcReduction="10000"/>
-          </a:bodyPr>
-          <a:p>
-            <a:r>
-              <a:rPr lang="en-US" altLang="zh-CN"/>
-              <a:t>Check apk signature</a:t>
-            </a:r>
-            <a:endParaRPr lang="en-US" altLang="zh-CN"/>
-          </a:p>
-          <a:p>
-            <a:pPr lvl="1"/>
-            <a:r>
-              <a:rPr lang="en-US" altLang="zh-CN"/>
-              <a:t>keytool -printcert -jarfile {a.apk}</a:t>
-            </a:r>
-            <a:endParaRPr lang="en-US" altLang="zh-CN"/>
-          </a:p>
-          <a:p>
-            <a:pPr lvl="0"/>
-            <a:r>
-              <a:rPr lang="en-US" altLang="zh-CN"/>
-              <a:t>Check apk package name</a:t>
-            </a:r>
-            <a:endParaRPr lang="en-US" altLang="zh-CN"/>
-          </a:p>
-          <a:p>
-            <a:pPr lvl="1"/>
-            <a:r>
-              <a:rPr lang="en-US" altLang="zh-CN"/>
-              <a:t>aapt dump badging {a.apk} | grep package:\ name</a:t>
-            </a:r>
-            <a:endParaRPr lang="en-US" altLang="zh-CN"/>
-          </a:p>
-        </p:txBody>
-      </p:sp>
-    </p:spTree>
-    <p:custDataLst>
-      <p:tags r:id="rId1"/>
-    </p:custDataLst>
-  </p:cSld>
-  <p:clrMapOvr>
-    <a:masterClrMapping/>
-  </p:clrMapOvr>
-</p:sld>
-</file>
-
-<file path=ppt/slides/slide8.xml><?xml version="1.0" encoding="utf-8"?>
-<p:sld xmlns:a="http://schemas.openxmlformats.org/drawingml/2006/main" xmlns:r="http://schemas.openxmlformats.org/officeDocument/2006/relationships" xmlns:p="http://schemas.openxmlformats.org/presentationml/2006/main">
-  <p:cSld>
-    <p:spTree>
-      <p:nvGrpSpPr>
-        <p:cNvPr id="1" name=""/>
-        <p:cNvGrpSpPr/>
-        <p:nvPr/>
-      </p:nvGrpSpPr>
-      <p:grpSpPr/>
-      <p:sp>
-        <p:nvSpPr>
-          <p:cNvPr id="2" name="标题 1"/>
-          <p:cNvSpPr>
-            <a:spLocks noGrp="1"/>
-          </p:cNvSpPr>
-          <p:nvPr>
-            <p:ph type="title"/>
-          </p:nvPr>
-        </p:nvSpPr>
-        <p:spPr/>
-        <p:txBody>
-          <a:bodyPr/>
-          <a:p>
-            <a:r>
-              <a:rPr lang="en-US" altLang="zh-CN"/>
-              <a:t>Keystore</a:t>
-            </a:r>
-            <a:endParaRPr lang="en-US" altLang="zh-CN"/>
-          </a:p>
-        </p:txBody>
-      </p:sp>
-      <p:sp>
-        <p:nvSpPr>
-          <p:cNvPr id="3" name="内容占位符 2"/>
-          <p:cNvSpPr>
-            <a:spLocks noGrp="1"/>
-          </p:cNvSpPr>
-          <p:nvPr>
-            <p:ph idx="1"/>
-          </p:nvPr>
-        </p:nvSpPr>
-        <p:spPr/>
-        <p:txBody>
-          <a:bodyPr/>
-          <a:p>
-            <a:r>
-              <a:rPr lang="en-US" altLang="zh-CN"/>
-              <a:t>Generate</a:t>
-            </a:r>
-            <a:endParaRPr lang="en-US" altLang="zh-CN"/>
-          </a:p>
-          <a:p>
-            <a:pPr lvl="1"/>
-            <a:r>
-              <a:rPr lang="en-US" altLang="zh-CN"/>
-              <a:t>keytool -genkey -alias mydomain -keyalg RSA -keystore keystore.jks  -keysize 2048</a:t>
-            </a:r>
-            <a:endParaRPr lang="en-US" altLang="zh-CN"/>
-          </a:p>
-          <a:p>
-            <a:r>
-              <a:rPr lang="en-US" altLang="zh-CN"/>
-              <a:t>Verify</a:t>
-            </a:r>
-            <a:endParaRPr lang="en-US" altLang="zh-CN"/>
-          </a:p>
-          <a:p>
-            <a:pPr lvl="1"/>
-            <a:r>
-              <a:rPr lang="en-US" altLang="zh-CN"/>
-              <a:t>onkstore -file my_keystore -verify</a:t>
-            </a:r>
-            <a:endParaRPr lang="en-US" altLang="zh-CN"/>
-          </a:p>
-          <a:p>
-            <a:pPr lvl="1"/>
-            <a:r>
-              <a:rPr lang="en-US" altLang="zh-CN"/>
-              <a:t>keytool -list -v -keystore keystore.jks</a:t>
-            </a:r>
-            <a:endParaRPr lang="en-US" altLang="zh-CN"/>
-          </a:p>
-          <a:p>
-            <a:pPr lvl="1"/>
-            <a:endParaRPr lang="en-US" altLang="zh-CN"/>
-          </a:p>
-        </p:txBody>
-      </p:sp>
-    </p:spTree>
-    <p:custDataLst>
-      <p:tags r:id="rId1"/>
-    </p:custDataLst>
-  </p:cSld>
-  <p:clrMapOvr>
-    <a:masterClrMapping/>
-  </p:clrMapOvr>
-</p:sld>
-</file>
-
-<file path=ppt/slides/slide9.xml><?xml version="1.0" encoding="utf-8"?>
-<p:sld xmlns:a="http://schemas.openxmlformats.org/drawingml/2006/main" xmlns:r="http://schemas.openxmlformats.org/officeDocument/2006/relationships" xmlns:p="http://schemas.openxmlformats.org/presentationml/2006/main">
-  <p:cSld>
-    <p:spTree>
-      <p:nvGrpSpPr>
-        <p:cNvPr id="1" name=""/>
-        <p:cNvGrpSpPr/>
-        <p:nvPr/>
-      </p:nvGrpSpPr>
-      <p:grpSpPr/>
-      <p:sp>
-        <p:nvSpPr>
-          <p:cNvPr id="2" name="标题 1"/>
-          <p:cNvSpPr>
-            <a:spLocks noGrp="1"/>
-          </p:cNvSpPr>
-          <p:nvPr>
-            <p:ph type="title"/>
-          </p:nvPr>
-        </p:nvSpPr>
-        <p:spPr/>
-        <p:txBody>
-          <a:bodyPr/>
-          <a:p>
-            <a:r>
-              <a:rPr lang="en-US" altLang="zh-CN"/>
-              <a:t>Apps</a:t>
-            </a:r>
-            <a:endParaRPr lang="en-US" altLang="zh-CN"/>
-          </a:p>
-        </p:txBody>
-      </p:sp>
-      <p:sp>
-        <p:nvSpPr>
-          <p:cNvPr id="3" name="内容占位符 2"/>
-          <p:cNvSpPr>
-            <a:spLocks noGrp="1"/>
-          </p:cNvSpPr>
-          <p:nvPr>
-            <p:ph idx="1"/>
-          </p:nvPr>
-        </p:nvSpPr>
-        <p:spPr/>
-        <p:txBody>
-          <a:bodyPr/>
-          <a:p>
-            <a:r>
-              <a:rPr lang="en-US" altLang="zh-CN"/>
-              <a:t>Termux</a:t>
-            </a:r>
-            <a:endParaRPr lang="en-US" altLang="zh-CN"/>
-          </a:p>
-          <a:p>
-            <a:pPr lvl="1"/>
-            <a:r>
-              <a:rPr lang="en-US" altLang="zh-CN"/>
-              <a:t>https://f-droid.org/packages/com.termux/</a:t>
-            </a:r>
-            <a:endParaRPr lang="en-US" altLang="zh-CN"/>
-          </a:p>
-          <a:p>
-            <a:pPr lvl="1"/>
-            <a:r>
-              <a:rPr lang="en-US" altLang="zh-CN"/>
-              <a:t>terminal app</a:t>
-            </a:r>
-            <a:endParaRPr lang="en-US" altLang="zh-CN"/>
-          </a:p>
-        </p:txBody>
-      </p:sp>
-    </p:spTree>
-    <p:custDataLst>
-      <p:tags r:id="rId1"/>
     </p:custDataLst>
   </p:cSld>
   <p:clrMapOvr>
@@ -5878,8 +7461,41 @@
 
 <file path=ppt/tags/tag15.xml><?xml version="1.0" encoding="utf-8"?>
 <p:tagLst xmlns:p="http://schemas.openxmlformats.org/presentationml/2006/main">
-  <p:tag name="KSO_WPP_MARK_KEY" val="4565476a-3172-4a08-acd7-da227ddc8079"/>
-  <p:tag name="COMMONDATA" val="eyJoZGlkIjoiODcwZjc5M2RmYzUwOWE5MjVkODVjZGMyZDUwOTRjYmEifQ=="/>
+  <p:tag name="KSO_WM_BEAUTIFY_FLAG" val="#wm#"/>
+  <p:tag name="KSO_WM_TEMPLATE_CATEGORY" val="custom"/>
+  <p:tag name="KSO_WM_TEMPLATE_INDEX" val="160402"/>
+</p:tagLst>
+</file>
+
+<file path=ppt/tags/tag16.xml><?xml version="1.0" encoding="utf-8"?>
+<p:tagLst xmlns:p="http://schemas.openxmlformats.org/presentationml/2006/main">
+  <p:tag name="KSO_WM_BEAUTIFY_FLAG" val="#wm#"/>
+  <p:tag name="KSO_WM_TEMPLATE_CATEGORY" val="custom"/>
+  <p:tag name="KSO_WM_TEMPLATE_INDEX" val="160402"/>
+</p:tagLst>
+</file>
+
+<file path=ppt/tags/tag17.xml><?xml version="1.0" encoding="utf-8"?>
+<p:tagLst xmlns:p="http://schemas.openxmlformats.org/presentationml/2006/main">
+  <p:tag name="KSO_WM_BEAUTIFY_FLAG" val="#wm#"/>
+  <p:tag name="KSO_WM_TEMPLATE_CATEGORY" val="custom"/>
+  <p:tag name="KSO_WM_TEMPLATE_INDEX" val="160402"/>
+</p:tagLst>
+</file>
+
+<file path=ppt/tags/tag18.xml><?xml version="1.0" encoding="utf-8"?>
+<p:tagLst xmlns:p="http://schemas.openxmlformats.org/presentationml/2006/main">
+  <p:tag name="KSO_WM_BEAUTIFY_FLAG" val="#wm#"/>
+  <p:tag name="KSO_WM_TEMPLATE_CATEGORY" val="custom"/>
+  <p:tag name="KSO_WM_TEMPLATE_INDEX" val="160402"/>
+</p:tagLst>
+</file>
+
+<file path=ppt/tags/tag19.xml><?xml version="1.0" encoding="utf-8"?>
+<p:tagLst xmlns:p="http://schemas.openxmlformats.org/presentationml/2006/main">
+  <p:tag name="KSO_WM_BEAUTIFY_FLAG" val="#wm#"/>
+  <p:tag name="KSO_WM_TEMPLATE_CATEGORY" val="custom"/>
+  <p:tag name="KSO_WM_TEMPLATE_INDEX" val="160402"/>
 </p:tagLst>
 </file>
 
@@ -5888,6 +7504,14 @@
   <p:tag name="KSO_WM_TAG_VERSION" val="1.0"/>
   <p:tag name="KSO_WM_TEMPLATE_CATEGORY" val="custom"/>
   <p:tag name="KSO_WM_TEMPLATE_INDEX" val="160402"/>
+</p:tagLst>
+</file>
+
+<file path=ppt/tags/tag20.xml><?xml version="1.0" encoding="utf-8"?>
+<p:tagLst xmlns:p="http://schemas.openxmlformats.org/presentationml/2006/main">
+  <p:tag name="KSO_WPP_MARK_KEY" val="4565476a-3172-4a08-acd7-da227ddc8079"/>
+  <p:tag name="COMMONDATA" val="eyJoZGlkIjoiODcwZjc5M2RmYzUwOWE5MjVkODVjZGMyZDUwOTRjYmEifQ=="/>
+  <p:tag name="commondata" val="eyJoZGlkIjoiYjRhZjQ5NWVmZmQxNmM3NmNkNDYxNWRmNzNmMjA1ZDAifQ=="/>
 </p:tagLst>
 </file>
 
@@ -5918,6 +7542,7 @@
 
 <file path=ppt/tags/tag6.xml><?xml version="1.0" encoding="utf-8"?>
 <p:tagLst xmlns:p="http://schemas.openxmlformats.org/presentationml/2006/main">
+  <p:tag name="KSO_WM_BEAUTIFY_FLAG" val="#wm#"/>
   <p:tag name="KSO_WM_TEMPLATE_CATEGORY" val="custom"/>
   <p:tag name="KSO_WM_TEMPLATE_INDEX" val="160402"/>
 </p:tagLst>
@@ -5941,7 +7566,6 @@
 
 <file path=ppt/tags/tag9.xml><?xml version="1.0" encoding="utf-8"?>
 <p:tagLst xmlns:p="http://schemas.openxmlformats.org/presentationml/2006/main">
-  <p:tag name="KSO_WM_BEAUTIFY_FLAG" val="#wm#"/>
   <p:tag name="KSO_WM_TEMPLATE_CATEGORY" val="custom"/>
   <p:tag name="KSO_WM_TEMPLATE_INDEX" val="160402"/>
 </p:tagLst>
